--- a/親眼看見你.pptx
+++ b/親眼看見你.pptx
@@ -110,6 +110,11 @@
       </a:defRPr>
     </a:lvl9pPr>
   </p:defaultTextStyle>
+  <p:extLst>
+    <p:ext uri="{EFAFB233-063F-42B5-8137-9DF3F51BA10A}">
+      <p15:sldGuideLst xmlns:p15="http://schemas.microsoft.com/office/powerpoint/2012/main"/>
+    </p:ext>
+  </p:extLst>
 </p:presentation>
 </file>
 
@@ -151,7 +156,7 @@
           <a:lstStyle/>
           <a:p>
             <a:r>
-              <a:rPr lang="en-US" altLang="zh-TW" smtClean="0"/>
+              <a:rPr lang="en-US" altLang="zh-TW"/>
               <a:t>Click to edit Master title style</a:t>
             </a:r>
             <a:endParaRPr lang="zh-TW" altLang="en-US"/>
@@ -270,7 +275,7 @@
           </a:lstStyle>
           <a:p>
             <a:r>
-              <a:rPr lang="en-US" altLang="zh-TW" smtClean="0"/>
+              <a:rPr lang="en-US" altLang="zh-TW"/>
               <a:t>Click to edit Master subtitle style</a:t>
             </a:r>
             <a:endParaRPr lang="zh-TW" altLang="en-US"/>
@@ -294,7 +299,7 @@
           <a:p>
             <a:fld id="{ABE69DC5-1037-40C5-BA52-B49D5C60A905}" type="datetimeFigureOut">
               <a:rPr lang="vi-VN" smtClean="0"/>
-              <a:t>01/01/2022</a:t>
+              <a:t>16/03/2024</a:t>
             </a:fld>
             <a:endParaRPr lang="vi-VN"/>
           </a:p>
@@ -388,7 +393,7 @@
           <a:lstStyle/>
           <a:p>
             <a:r>
-              <a:rPr lang="en-US" altLang="zh-TW" smtClean="0"/>
+              <a:rPr lang="en-US" altLang="zh-TW"/>
               <a:t>Click to edit Master title style</a:t>
             </a:r>
             <a:endParaRPr lang="zh-TW" altLang="en-US"/>
@@ -412,35 +417,35 @@
           <a:p>
             <a:pPr lvl="0"/>
             <a:r>
-              <a:rPr lang="en-US" altLang="zh-TW" smtClean="0"/>
+              <a:rPr lang="en-US" altLang="zh-TW"/>
               <a:t>Edit Master text styles</a:t>
             </a:r>
           </a:p>
           <a:p>
             <a:pPr lvl="1"/>
             <a:r>
-              <a:rPr lang="en-US" altLang="zh-TW" smtClean="0"/>
+              <a:rPr lang="en-US" altLang="zh-TW"/>
               <a:t>Second level</a:t>
             </a:r>
           </a:p>
           <a:p>
             <a:pPr lvl="2"/>
             <a:r>
-              <a:rPr lang="en-US" altLang="zh-TW" smtClean="0"/>
+              <a:rPr lang="en-US" altLang="zh-TW"/>
               <a:t>Third level</a:t>
             </a:r>
           </a:p>
           <a:p>
             <a:pPr lvl="3"/>
             <a:r>
-              <a:rPr lang="en-US" altLang="zh-TW" smtClean="0"/>
+              <a:rPr lang="en-US" altLang="zh-TW"/>
               <a:t>Fourth level</a:t>
             </a:r>
           </a:p>
           <a:p>
             <a:pPr lvl="4"/>
             <a:r>
-              <a:rPr lang="en-US" altLang="zh-TW" smtClean="0"/>
+              <a:rPr lang="en-US" altLang="zh-TW"/>
               <a:t>Fifth level</a:t>
             </a:r>
             <a:endParaRPr lang="zh-TW" altLang="en-US"/>
@@ -464,7 +469,7 @@
           <a:p>
             <a:fld id="{ABE69DC5-1037-40C5-BA52-B49D5C60A905}" type="datetimeFigureOut">
               <a:rPr lang="vi-VN" smtClean="0"/>
-              <a:t>01/01/2022</a:t>
+              <a:t>16/03/2024</a:t>
             </a:fld>
             <a:endParaRPr lang="vi-VN"/>
           </a:p>
@@ -563,7 +568,7 @@
           <a:lstStyle/>
           <a:p>
             <a:r>
-              <a:rPr lang="en-US" altLang="zh-TW" smtClean="0"/>
+              <a:rPr lang="en-US" altLang="zh-TW"/>
               <a:t>Click to edit Master title style</a:t>
             </a:r>
             <a:endParaRPr lang="zh-TW" altLang="en-US"/>
@@ -592,35 +597,35 @@
           <a:p>
             <a:pPr lvl="0"/>
             <a:r>
-              <a:rPr lang="en-US" altLang="zh-TW" smtClean="0"/>
+              <a:rPr lang="en-US" altLang="zh-TW"/>
               <a:t>Edit Master text styles</a:t>
             </a:r>
           </a:p>
           <a:p>
             <a:pPr lvl="1"/>
             <a:r>
-              <a:rPr lang="en-US" altLang="zh-TW" smtClean="0"/>
+              <a:rPr lang="en-US" altLang="zh-TW"/>
               <a:t>Second level</a:t>
             </a:r>
           </a:p>
           <a:p>
             <a:pPr lvl="2"/>
             <a:r>
-              <a:rPr lang="en-US" altLang="zh-TW" smtClean="0"/>
+              <a:rPr lang="en-US" altLang="zh-TW"/>
               <a:t>Third level</a:t>
             </a:r>
           </a:p>
           <a:p>
             <a:pPr lvl="3"/>
             <a:r>
-              <a:rPr lang="en-US" altLang="zh-TW" smtClean="0"/>
+              <a:rPr lang="en-US" altLang="zh-TW"/>
               <a:t>Fourth level</a:t>
             </a:r>
           </a:p>
           <a:p>
             <a:pPr lvl="4"/>
             <a:r>
-              <a:rPr lang="en-US" altLang="zh-TW" smtClean="0"/>
+              <a:rPr lang="en-US" altLang="zh-TW"/>
               <a:t>Fifth level</a:t>
             </a:r>
             <a:endParaRPr lang="zh-TW" altLang="en-US"/>
@@ -644,7 +649,7 @@
           <a:p>
             <a:fld id="{ABE69DC5-1037-40C5-BA52-B49D5C60A905}" type="datetimeFigureOut">
               <a:rPr lang="vi-VN" smtClean="0"/>
-              <a:t>01/01/2022</a:t>
+              <a:t>16/03/2024</a:t>
             </a:fld>
             <a:endParaRPr lang="vi-VN"/>
           </a:p>
@@ -738,7 +743,7 @@
           <a:lstStyle/>
           <a:p>
             <a:r>
-              <a:rPr lang="en-US" altLang="zh-TW" smtClean="0"/>
+              <a:rPr lang="en-US" altLang="zh-TW"/>
               <a:t>Click to edit Master title style</a:t>
             </a:r>
             <a:endParaRPr lang="zh-TW" altLang="en-US"/>
@@ -762,35 +767,35 @@
           <a:p>
             <a:pPr lvl="0"/>
             <a:r>
-              <a:rPr lang="en-US" altLang="zh-TW" smtClean="0"/>
+              <a:rPr lang="en-US" altLang="zh-TW"/>
               <a:t>Edit Master text styles</a:t>
             </a:r>
           </a:p>
           <a:p>
             <a:pPr lvl="1"/>
             <a:r>
-              <a:rPr lang="en-US" altLang="zh-TW" smtClean="0"/>
+              <a:rPr lang="en-US" altLang="zh-TW"/>
               <a:t>Second level</a:t>
             </a:r>
           </a:p>
           <a:p>
             <a:pPr lvl="2"/>
             <a:r>
-              <a:rPr lang="en-US" altLang="zh-TW" smtClean="0"/>
+              <a:rPr lang="en-US" altLang="zh-TW"/>
               <a:t>Third level</a:t>
             </a:r>
           </a:p>
           <a:p>
             <a:pPr lvl="3"/>
             <a:r>
-              <a:rPr lang="en-US" altLang="zh-TW" smtClean="0"/>
+              <a:rPr lang="en-US" altLang="zh-TW"/>
               <a:t>Fourth level</a:t>
             </a:r>
           </a:p>
           <a:p>
             <a:pPr lvl="4"/>
             <a:r>
-              <a:rPr lang="en-US" altLang="zh-TW" smtClean="0"/>
+              <a:rPr lang="en-US" altLang="zh-TW"/>
               <a:t>Fifth level</a:t>
             </a:r>
             <a:endParaRPr lang="zh-TW" altLang="en-US"/>
@@ -814,7 +819,7 @@
           <a:p>
             <a:fld id="{ABE69DC5-1037-40C5-BA52-B49D5C60A905}" type="datetimeFigureOut">
               <a:rPr lang="vi-VN" smtClean="0"/>
-              <a:t>01/01/2022</a:t>
+              <a:t>16/03/2024</a:t>
             </a:fld>
             <a:endParaRPr lang="vi-VN"/>
           </a:p>
@@ -917,7 +922,7 @@
           </a:lstStyle>
           <a:p>
             <a:r>
-              <a:rPr lang="en-US" altLang="zh-TW" smtClean="0"/>
+              <a:rPr lang="en-US" altLang="zh-TW"/>
               <a:t>Click to edit Master title style</a:t>
             </a:r>
             <a:endParaRPr lang="zh-TW" altLang="en-US"/>
@@ -1037,7 +1042,7 @@
           <a:p>
             <a:pPr lvl="0"/>
             <a:r>
-              <a:rPr lang="en-US" altLang="zh-TW" smtClean="0"/>
+              <a:rPr lang="en-US" altLang="zh-TW"/>
               <a:t>Edit Master text styles</a:t>
             </a:r>
           </a:p>
@@ -1060,7 +1065,7 @@
           <a:p>
             <a:fld id="{ABE69DC5-1037-40C5-BA52-B49D5C60A905}" type="datetimeFigureOut">
               <a:rPr lang="vi-VN" smtClean="0"/>
-              <a:t>01/01/2022</a:t>
+              <a:t>16/03/2024</a:t>
             </a:fld>
             <a:endParaRPr lang="vi-VN"/>
           </a:p>
@@ -1154,7 +1159,7 @@
           <a:lstStyle/>
           <a:p>
             <a:r>
-              <a:rPr lang="en-US" altLang="zh-TW" smtClean="0"/>
+              <a:rPr lang="en-US" altLang="zh-TW"/>
               <a:t>Click to edit Master title style</a:t>
             </a:r>
             <a:endParaRPr lang="zh-TW" altLang="en-US"/>
@@ -1211,35 +1216,35 @@
           <a:p>
             <a:pPr lvl="0"/>
             <a:r>
-              <a:rPr lang="en-US" altLang="zh-TW" smtClean="0"/>
+              <a:rPr lang="en-US" altLang="zh-TW"/>
               <a:t>Edit Master text styles</a:t>
             </a:r>
           </a:p>
           <a:p>
             <a:pPr lvl="1"/>
             <a:r>
-              <a:rPr lang="en-US" altLang="zh-TW" smtClean="0"/>
+              <a:rPr lang="en-US" altLang="zh-TW"/>
               <a:t>Second level</a:t>
             </a:r>
           </a:p>
           <a:p>
             <a:pPr lvl="2"/>
             <a:r>
-              <a:rPr lang="en-US" altLang="zh-TW" smtClean="0"/>
+              <a:rPr lang="en-US" altLang="zh-TW"/>
               <a:t>Third level</a:t>
             </a:r>
           </a:p>
           <a:p>
             <a:pPr lvl="3"/>
             <a:r>
-              <a:rPr lang="en-US" altLang="zh-TW" smtClean="0"/>
+              <a:rPr lang="en-US" altLang="zh-TW"/>
               <a:t>Fourth level</a:t>
             </a:r>
           </a:p>
           <a:p>
             <a:pPr lvl="4"/>
             <a:r>
-              <a:rPr lang="en-US" altLang="zh-TW" smtClean="0"/>
+              <a:rPr lang="en-US" altLang="zh-TW"/>
               <a:t>Fifth level</a:t>
             </a:r>
             <a:endParaRPr lang="zh-TW" altLang="en-US"/>
@@ -1296,35 +1301,35 @@
           <a:p>
             <a:pPr lvl="0"/>
             <a:r>
-              <a:rPr lang="en-US" altLang="zh-TW" smtClean="0"/>
+              <a:rPr lang="en-US" altLang="zh-TW"/>
               <a:t>Edit Master text styles</a:t>
             </a:r>
           </a:p>
           <a:p>
             <a:pPr lvl="1"/>
             <a:r>
-              <a:rPr lang="en-US" altLang="zh-TW" smtClean="0"/>
+              <a:rPr lang="en-US" altLang="zh-TW"/>
               <a:t>Second level</a:t>
             </a:r>
           </a:p>
           <a:p>
             <a:pPr lvl="2"/>
             <a:r>
-              <a:rPr lang="en-US" altLang="zh-TW" smtClean="0"/>
+              <a:rPr lang="en-US" altLang="zh-TW"/>
               <a:t>Third level</a:t>
             </a:r>
           </a:p>
           <a:p>
             <a:pPr lvl="3"/>
             <a:r>
-              <a:rPr lang="en-US" altLang="zh-TW" smtClean="0"/>
+              <a:rPr lang="en-US" altLang="zh-TW"/>
               <a:t>Fourth level</a:t>
             </a:r>
           </a:p>
           <a:p>
             <a:pPr lvl="4"/>
             <a:r>
-              <a:rPr lang="en-US" altLang="zh-TW" smtClean="0"/>
+              <a:rPr lang="en-US" altLang="zh-TW"/>
               <a:t>Fifth level</a:t>
             </a:r>
             <a:endParaRPr lang="zh-TW" altLang="en-US"/>
@@ -1348,7 +1353,7 @@
           <a:p>
             <a:fld id="{ABE69DC5-1037-40C5-BA52-B49D5C60A905}" type="datetimeFigureOut">
               <a:rPr lang="vi-VN" smtClean="0"/>
-              <a:t>01/01/2022</a:t>
+              <a:t>16/03/2024</a:t>
             </a:fld>
             <a:endParaRPr lang="vi-VN"/>
           </a:p>
@@ -1446,7 +1451,7 @@
           </a:lstStyle>
           <a:p>
             <a:r>
-              <a:rPr lang="en-US" altLang="zh-TW" smtClean="0"/>
+              <a:rPr lang="en-US" altLang="zh-TW"/>
               <a:t>Click to edit Master title style</a:t>
             </a:r>
             <a:endParaRPr lang="zh-TW" altLang="en-US"/>
@@ -1512,7 +1517,7 @@
           <a:p>
             <a:pPr lvl="0"/>
             <a:r>
-              <a:rPr lang="en-US" altLang="zh-TW" smtClean="0"/>
+              <a:rPr lang="en-US" altLang="zh-TW"/>
               <a:t>Edit Master text styles</a:t>
             </a:r>
           </a:p>
@@ -1568,35 +1573,35 @@
           <a:p>
             <a:pPr lvl="0"/>
             <a:r>
-              <a:rPr lang="en-US" altLang="zh-TW" smtClean="0"/>
+              <a:rPr lang="en-US" altLang="zh-TW"/>
               <a:t>Edit Master text styles</a:t>
             </a:r>
           </a:p>
           <a:p>
             <a:pPr lvl="1"/>
             <a:r>
-              <a:rPr lang="en-US" altLang="zh-TW" smtClean="0"/>
+              <a:rPr lang="en-US" altLang="zh-TW"/>
               <a:t>Second level</a:t>
             </a:r>
           </a:p>
           <a:p>
             <a:pPr lvl="2"/>
             <a:r>
-              <a:rPr lang="en-US" altLang="zh-TW" smtClean="0"/>
+              <a:rPr lang="en-US" altLang="zh-TW"/>
               <a:t>Third level</a:t>
             </a:r>
           </a:p>
           <a:p>
             <a:pPr lvl="3"/>
             <a:r>
-              <a:rPr lang="en-US" altLang="zh-TW" smtClean="0"/>
+              <a:rPr lang="en-US" altLang="zh-TW"/>
               <a:t>Fourth level</a:t>
             </a:r>
           </a:p>
           <a:p>
             <a:pPr lvl="4"/>
             <a:r>
-              <a:rPr lang="en-US" altLang="zh-TW" smtClean="0"/>
+              <a:rPr lang="en-US" altLang="zh-TW"/>
               <a:t>Fifth level</a:t>
             </a:r>
             <a:endParaRPr lang="zh-TW" altLang="en-US"/>
@@ -1662,7 +1667,7 @@
           <a:p>
             <a:pPr lvl="0"/>
             <a:r>
-              <a:rPr lang="en-US" altLang="zh-TW" smtClean="0"/>
+              <a:rPr lang="en-US" altLang="zh-TW"/>
               <a:t>Edit Master text styles</a:t>
             </a:r>
           </a:p>
@@ -1718,35 +1723,35 @@
           <a:p>
             <a:pPr lvl="0"/>
             <a:r>
-              <a:rPr lang="en-US" altLang="zh-TW" smtClean="0"/>
+              <a:rPr lang="en-US" altLang="zh-TW"/>
               <a:t>Edit Master text styles</a:t>
             </a:r>
           </a:p>
           <a:p>
             <a:pPr lvl="1"/>
             <a:r>
-              <a:rPr lang="en-US" altLang="zh-TW" smtClean="0"/>
+              <a:rPr lang="en-US" altLang="zh-TW"/>
               <a:t>Second level</a:t>
             </a:r>
           </a:p>
           <a:p>
             <a:pPr lvl="2"/>
             <a:r>
-              <a:rPr lang="en-US" altLang="zh-TW" smtClean="0"/>
+              <a:rPr lang="en-US" altLang="zh-TW"/>
               <a:t>Third level</a:t>
             </a:r>
           </a:p>
           <a:p>
             <a:pPr lvl="3"/>
             <a:r>
-              <a:rPr lang="en-US" altLang="zh-TW" smtClean="0"/>
+              <a:rPr lang="en-US" altLang="zh-TW"/>
               <a:t>Fourth level</a:t>
             </a:r>
           </a:p>
           <a:p>
             <a:pPr lvl="4"/>
             <a:r>
-              <a:rPr lang="en-US" altLang="zh-TW" smtClean="0"/>
+              <a:rPr lang="en-US" altLang="zh-TW"/>
               <a:t>Fifth level</a:t>
             </a:r>
             <a:endParaRPr lang="zh-TW" altLang="en-US"/>
@@ -1770,7 +1775,7 @@
           <a:p>
             <a:fld id="{ABE69DC5-1037-40C5-BA52-B49D5C60A905}" type="datetimeFigureOut">
               <a:rPr lang="vi-VN" smtClean="0"/>
-              <a:t>01/01/2022</a:t>
+              <a:t>16/03/2024</a:t>
             </a:fld>
             <a:endParaRPr lang="vi-VN"/>
           </a:p>
@@ -1864,7 +1869,7 @@
           <a:lstStyle/>
           <a:p>
             <a:r>
-              <a:rPr lang="en-US" altLang="zh-TW" smtClean="0"/>
+              <a:rPr lang="en-US" altLang="zh-TW"/>
               <a:t>Click to edit Master title style</a:t>
             </a:r>
             <a:endParaRPr lang="zh-TW" altLang="en-US"/>
@@ -1888,7 +1893,7 @@
           <a:p>
             <a:fld id="{ABE69DC5-1037-40C5-BA52-B49D5C60A905}" type="datetimeFigureOut">
               <a:rPr lang="vi-VN" smtClean="0"/>
-              <a:t>01/01/2022</a:t>
+              <a:t>16/03/2024</a:t>
             </a:fld>
             <a:endParaRPr lang="vi-VN"/>
           </a:p>
@@ -1983,7 +1988,7 @@
           <a:p>
             <a:fld id="{ABE69DC5-1037-40C5-BA52-B49D5C60A905}" type="datetimeFigureOut">
               <a:rPr lang="vi-VN" smtClean="0"/>
-              <a:t>01/01/2022</a:t>
+              <a:t>16/03/2024</a:t>
             </a:fld>
             <a:endParaRPr lang="vi-VN"/>
           </a:p>
@@ -2086,7 +2091,7 @@
           </a:lstStyle>
           <a:p>
             <a:r>
-              <a:rPr lang="en-US" altLang="zh-TW" smtClean="0"/>
+              <a:rPr lang="en-US" altLang="zh-TW"/>
               <a:t>Click to edit Master title style</a:t>
             </a:r>
             <a:endParaRPr lang="zh-TW" altLang="en-US"/>
@@ -2143,35 +2148,35 @@
           <a:p>
             <a:pPr lvl="0"/>
             <a:r>
-              <a:rPr lang="en-US" altLang="zh-TW" smtClean="0"/>
+              <a:rPr lang="en-US" altLang="zh-TW"/>
               <a:t>Edit Master text styles</a:t>
             </a:r>
           </a:p>
           <a:p>
             <a:pPr lvl="1"/>
             <a:r>
-              <a:rPr lang="en-US" altLang="zh-TW" smtClean="0"/>
+              <a:rPr lang="en-US" altLang="zh-TW"/>
               <a:t>Second level</a:t>
             </a:r>
           </a:p>
           <a:p>
             <a:pPr lvl="2"/>
             <a:r>
-              <a:rPr lang="en-US" altLang="zh-TW" smtClean="0"/>
+              <a:rPr lang="en-US" altLang="zh-TW"/>
               <a:t>Third level</a:t>
             </a:r>
           </a:p>
           <a:p>
             <a:pPr lvl="3"/>
             <a:r>
-              <a:rPr lang="en-US" altLang="zh-TW" smtClean="0"/>
+              <a:rPr lang="en-US" altLang="zh-TW"/>
               <a:t>Fourth level</a:t>
             </a:r>
           </a:p>
           <a:p>
             <a:pPr lvl="4"/>
             <a:r>
-              <a:rPr lang="en-US" altLang="zh-TW" smtClean="0"/>
+              <a:rPr lang="en-US" altLang="zh-TW"/>
               <a:t>Fifth level</a:t>
             </a:r>
             <a:endParaRPr lang="zh-TW" altLang="en-US"/>
@@ -2237,7 +2242,7 @@
           <a:p>
             <a:pPr lvl="0"/>
             <a:r>
-              <a:rPr lang="en-US" altLang="zh-TW" smtClean="0"/>
+              <a:rPr lang="en-US" altLang="zh-TW"/>
               <a:t>Edit Master text styles</a:t>
             </a:r>
           </a:p>
@@ -2260,7 +2265,7 @@
           <a:p>
             <a:fld id="{ABE69DC5-1037-40C5-BA52-B49D5C60A905}" type="datetimeFigureOut">
               <a:rPr lang="vi-VN" smtClean="0"/>
-              <a:t>01/01/2022</a:t>
+              <a:t>16/03/2024</a:t>
             </a:fld>
             <a:endParaRPr lang="vi-VN"/>
           </a:p>
@@ -2363,7 +2368,7 @@
           </a:lstStyle>
           <a:p>
             <a:r>
-              <a:rPr lang="en-US" altLang="zh-TW" smtClean="0"/>
+              <a:rPr lang="en-US" altLang="zh-TW"/>
               <a:t>Click to edit Master title style</a:t>
             </a:r>
             <a:endParaRPr lang="zh-TW" altLang="en-US"/>
@@ -2428,7 +2433,7 @@
           </a:lstStyle>
           <a:p>
             <a:r>
-              <a:rPr lang="en-US" altLang="zh-TW" smtClean="0"/>
+              <a:rPr lang="en-US" altLang="zh-TW"/>
               <a:t>Click icon to add picture</a:t>
             </a:r>
             <a:endParaRPr lang="zh-TW" altLang="en-US"/>
@@ -2494,7 +2499,7 @@
           <a:p>
             <a:pPr lvl="0"/>
             <a:r>
-              <a:rPr lang="en-US" altLang="zh-TW" smtClean="0"/>
+              <a:rPr lang="en-US" altLang="zh-TW"/>
               <a:t>Edit Master text styles</a:t>
             </a:r>
           </a:p>
@@ -2517,7 +2522,7 @@
           <a:p>
             <a:fld id="{ABE69DC5-1037-40C5-BA52-B49D5C60A905}" type="datetimeFigureOut">
               <a:rPr lang="vi-VN" smtClean="0"/>
-              <a:t>01/01/2022</a:t>
+              <a:t>16/03/2024</a:t>
             </a:fld>
             <a:endParaRPr lang="vi-VN"/>
           </a:p>
@@ -2631,10 +2636,9 @@
           <a:lstStyle/>
           <a:p>
             <a:r>
-              <a:rPr lang="zh-TW" altLang="en-US" smtClean="0"/>
+              <a:rPr lang="zh-TW" altLang="en-US"/>
               <a:t>按一下以編輯母片標題樣式</a:t>
             </a:r>
-            <a:endParaRPr lang="zh-TW" altLang="en-US"/>
           </a:p>
         </p:txBody>
       </p:sp>
@@ -2665,38 +2669,37 @@
           <a:p>
             <a:pPr lvl="0"/>
             <a:r>
-              <a:rPr lang="zh-TW" altLang="en-US" smtClean="0"/>
+              <a:rPr lang="zh-TW" altLang="en-US"/>
               <a:t>按一下以編輯母片文字樣式</a:t>
             </a:r>
           </a:p>
           <a:p>
             <a:pPr lvl="1"/>
             <a:r>
-              <a:rPr lang="zh-TW" altLang="en-US" smtClean="0"/>
+              <a:rPr lang="zh-TW" altLang="en-US"/>
               <a:t>第二層</a:t>
             </a:r>
           </a:p>
           <a:p>
             <a:pPr lvl="2"/>
             <a:r>
-              <a:rPr lang="zh-TW" altLang="en-US" smtClean="0"/>
+              <a:rPr lang="zh-TW" altLang="en-US"/>
               <a:t>第三層</a:t>
             </a:r>
           </a:p>
           <a:p>
             <a:pPr lvl="3"/>
             <a:r>
-              <a:rPr lang="zh-TW" altLang="en-US" smtClean="0"/>
+              <a:rPr lang="zh-TW" altLang="en-US"/>
               <a:t>第四層</a:t>
             </a:r>
           </a:p>
           <a:p>
             <a:pPr lvl="4"/>
             <a:r>
-              <a:rPr lang="zh-TW" altLang="en-US" smtClean="0"/>
+              <a:rPr lang="zh-TW" altLang="en-US"/>
               <a:t>第五層</a:t>
             </a:r>
-            <a:endParaRPr lang="zh-TW" altLang="en-US"/>
           </a:p>
         </p:txBody>
       </p:sp>
@@ -2735,7 +2738,7 @@
           <a:p>
             <a:fld id="{ABE69DC5-1037-40C5-BA52-B49D5C60A905}" type="datetimeFigureOut">
               <a:rPr lang="vi-VN" smtClean="0"/>
-              <a:t>01/01/2022</a:t>
+              <a:t>16/03/2024</a:t>
             </a:fld>
             <a:endParaRPr lang="vi-VN"/>
           </a:p>
@@ -3122,7 +3125,7 @@
         </p:nvSpPr>
         <p:spPr>
           <a:xfrm>
-            <a:off x="0" y="2756925"/>
+            <a:off x="0" y="2566425"/>
             <a:ext cx="12192000" cy="1143000"/>
           </a:xfrm>
         </p:spPr>
@@ -3147,24 +3150,7 @@
                 <a:latin typeface="微軟正黑體" pitchFamily="34" charset="-120"/>
                 <a:ea typeface="微軟正黑體" pitchFamily="34" charset="-120"/>
               </a:rPr>
-              <a:t>親</a:t>
-            </a:r>
-            <a:r>
-              <a:rPr lang="zh-CN" altLang="en-US" sz="7200" b="1" i="1" dirty="0">
-                <a:solidFill>
-                  <a:srgbClr val="660033"/>
-                </a:solidFill>
-                <a:effectLst>
-                  <a:outerShdw blurRad="38100" dist="38100" dir="2700000" algn="tl">
-                    <a:srgbClr val="000000">
-                      <a:alpha val="43137"/>
-                    </a:srgbClr>
-                  </a:outerShdw>
-                </a:effectLst>
-                <a:latin typeface="微軟正黑體" pitchFamily="34" charset="-120"/>
-                <a:ea typeface="微軟正黑體" pitchFamily="34" charset="-120"/>
-              </a:rPr>
-              <a:t>眼看見祢</a:t>
+              <a:t>親眼看見祢</a:t>
             </a:r>
             <a:endParaRPr lang="zh-TW" altLang="en-US" sz="7200" b="1" i="1" dirty="0">
               <a:solidFill>
@@ -3247,51 +3233,7 @@
                 <a:latin typeface="微軟正黑體" pitchFamily="34" charset="-120"/>
                 <a:ea typeface="微軟正黑體" pitchFamily="34" charset="-120"/>
               </a:rPr>
-              <a:t>有</a:t>
-            </a:r>
-            <a:r>
-              <a:rPr lang="zh-CN" altLang="en-US" sz="6400" b="1" dirty="0">
-                <a:solidFill>
-                  <a:srgbClr val="660033"/>
-                </a:solidFill>
-                <a:effectLst/>
-                <a:latin typeface="微軟正黑體" pitchFamily="34" charset="-120"/>
-                <a:ea typeface="微軟正黑體" pitchFamily="34" charset="-120"/>
-              </a:rPr>
-              <a:t>祢 </a:t>
-            </a:r>
-            <a:r>
-              <a:rPr lang="zh-CN" altLang="en-US" sz="6400" b="1" dirty="0">
-                <a:solidFill>
-                  <a:srgbClr val="660033"/>
-                </a:solidFill>
-                <a:effectLst/>
-                <a:latin typeface="微軟正黑體" pitchFamily="34" charset="-120"/>
-                <a:ea typeface="微軟正黑體" pitchFamily="34" charset="-120"/>
-              </a:rPr>
-              <a:t> 我</a:t>
-            </a:r>
-            <a:r>
-              <a:rPr lang="zh-CN" altLang="en-US" sz="6400" b="1" dirty="0">
-                <a:solidFill>
-                  <a:srgbClr val="660033"/>
-                </a:solidFill>
-                <a:effectLst/>
-                <a:latin typeface="微軟正黑體" pitchFamily="34" charset="-120"/>
-                <a:ea typeface="微軟正黑體" pitchFamily="34" charset="-120"/>
-              </a:rPr>
-              <a:t>生命不一</a:t>
-            </a:r>
-            <a:r>
-              <a:rPr lang="zh-CN" altLang="en-US" sz="6400" b="1" dirty="0">
-                <a:solidFill>
-                  <a:srgbClr val="660033"/>
-                </a:solidFill>
-                <a:effectLst/>
-                <a:latin typeface="微軟正黑體" pitchFamily="34" charset="-120"/>
-                <a:ea typeface="微軟正黑體" pitchFamily="34" charset="-120"/>
-              </a:rPr>
-              <a:t>樣</a:t>
+              <a:t>有祢  我生命不一樣</a:t>
             </a:r>
             <a:endParaRPr lang="en-US" altLang="zh-CN" sz="6400" b="1" dirty="0">
               <a:solidFill>
@@ -3315,40 +3257,7 @@
                 <a:latin typeface="微軟正黑體" pitchFamily="34" charset="-120"/>
                 <a:ea typeface="微軟正黑體" pitchFamily="34" charset="-120"/>
               </a:rPr>
-              <a:t>有</a:t>
-            </a:r>
-            <a:r>
-              <a:rPr lang="zh-CN" altLang="en-US" sz="6400" b="1" dirty="0">
-                <a:solidFill>
-                  <a:srgbClr val="660033"/>
-                </a:solidFill>
-                <a:effectLst/>
-                <a:latin typeface="微軟正黑體" pitchFamily="34" charset="-120"/>
-                <a:ea typeface="微軟正黑體" pitchFamily="34" charset="-120"/>
-              </a:rPr>
-              <a:t>祢 </a:t>
-            </a:r>
-            <a:r>
-              <a:rPr lang="zh-CN" altLang="en-US" sz="6400" b="1" dirty="0">
-                <a:solidFill>
-                  <a:srgbClr val="660033"/>
-                </a:solidFill>
-                <a:effectLst/>
-                <a:latin typeface="微軟正黑體" pitchFamily="34" charset="-120"/>
-                <a:ea typeface="微軟正黑體" pitchFamily="34" charset="-120"/>
-              </a:rPr>
-              <a:t> 我</a:t>
-            </a:r>
-            <a:r>
-              <a:rPr lang="zh-CN" altLang="en-US" sz="6400" b="1" dirty="0">
-                <a:solidFill>
-                  <a:srgbClr val="660033"/>
-                </a:solidFill>
-                <a:effectLst/>
-                <a:latin typeface="微軟正黑體" pitchFamily="34" charset="-120"/>
-                <a:ea typeface="微軟正黑體" pitchFamily="34" charset="-120"/>
-              </a:rPr>
-              <a:t>生命再燃亮</a:t>
+              <a:t>有祢  我生命再燃亮</a:t>
             </a:r>
             <a:endParaRPr lang="en-US" altLang="zh-TW" sz="6400" b="1" dirty="0">
               <a:solidFill>
@@ -3369,8 +3278,8 @@
         </p:nvSpPr>
         <p:spPr>
           <a:xfrm>
-            <a:off x="13653" y="5270432"/>
-            <a:ext cx="12178347" cy="830997"/>
+            <a:off x="13653" y="5331987"/>
+            <a:ext cx="12178347" cy="707886"/>
           </a:xfrm>
           <a:prstGeom prst="rect">
             <a:avLst/>
@@ -3385,7 +3294,7 @@
           <a:p>
             <a:pPr algn="ctr"/>
             <a:r>
-              <a:rPr lang="en-US" sz="4800" b="1" dirty="0">
+              <a:rPr lang="en-US" sz="4000" b="1" dirty="0">
                 <a:solidFill>
                   <a:srgbClr val="660033"/>
                 </a:solidFill>
@@ -3396,7 +3305,7 @@
               <a:t>( </a:t>
             </a:r>
             <a:r>
-              <a:rPr lang="zh-CN" altLang="en-US" sz="4800" b="1" dirty="0">
+              <a:rPr lang="zh-CN" altLang="en-US" sz="4000" b="1" dirty="0">
                 <a:solidFill>
                   <a:srgbClr val="660033"/>
                 </a:solidFill>
@@ -3404,10 +3313,10 @@
                 <a:latin typeface="Microsoft JhengHei" panose="020B0604030504040204" pitchFamily="34" charset="-120"/>
                 <a:ea typeface="Microsoft JhengHei" panose="020B0604030504040204" pitchFamily="34" charset="-120"/>
               </a:rPr>
-              <a:t>正</a:t>
-            </a:r>
-            <a:r>
-              <a:rPr lang="en-US" sz="4800" b="1" dirty="0">
+              <a:t>正歌</a:t>
+            </a:r>
+            <a:r>
+              <a:rPr lang="en-US" sz="4000" b="1" dirty="0">
                 <a:solidFill>
                   <a:srgbClr val="660033"/>
                 </a:solidFill>
@@ -3417,7 +3326,7 @@
               </a:rPr>
               <a:t> )</a:t>
             </a:r>
-            <a:endParaRPr lang="vi-VN" sz="4800" b="1" dirty="0">
+            <a:endParaRPr lang="vi-VN" sz="4000" b="1" dirty="0">
               <a:solidFill>
                 <a:srgbClr val="660033"/>
               </a:solidFill>
@@ -3492,40 +3401,7 @@
                 <a:latin typeface="微軟正黑體" pitchFamily="34" charset="-120"/>
                 <a:ea typeface="微軟正黑體" pitchFamily="34" charset="-120"/>
               </a:rPr>
-              <a:t>有祢 </a:t>
-            </a:r>
-            <a:r>
-              <a:rPr lang="zh-TW" altLang="en-US" sz="6400" b="1" dirty="0">
-                <a:solidFill>
-                  <a:srgbClr val="660033"/>
-                </a:solidFill>
-                <a:effectLst/>
-                <a:latin typeface="微軟正黑體" pitchFamily="34" charset="-120"/>
-                <a:ea typeface="微軟正黑體" pitchFamily="34" charset="-120"/>
-              </a:rPr>
-              <a:t> 我</a:t>
-            </a:r>
-            <a:r>
-              <a:rPr lang="zh-TW" altLang="en-US" sz="6400" b="1" dirty="0">
-                <a:solidFill>
-                  <a:srgbClr val="660033"/>
-                </a:solidFill>
-                <a:effectLst/>
-                <a:latin typeface="微軟正黑體" pitchFamily="34" charset="-120"/>
-                <a:ea typeface="微軟正黑體" pitchFamily="34" charset="-120"/>
-              </a:rPr>
-              <a:t>不害怕困</a:t>
-            </a:r>
-            <a:r>
-              <a:rPr lang="zh-TW" altLang="en-US" sz="6400" b="1" dirty="0">
-                <a:solidFill>
-                  <a:srgbClr val="660033"/>
-                </a:solidFill>
-                <a:effectLst/>
-                <a:latin typeface="微軟正黑體" pitchFamily="34" charset="-120"/>
-                <a:ea typeface="微軟正黑體" pitchFamily="34" charset="-120"/>
-              </a:rPr>
-              <a:t>難</a:t>
+              <a:t>有祢  我不害怕困難</a:t>
             </a:r>
             <a:endParaRPr lang="en-US" altLang="zh-TW" sz="6400" b="1" dirty="0">
               <a:solidFill>
@@ -3549,40 +3425,7 @@
                 <a:latin typeface="微軟正黑體" pitchFamily="34" charset="-120"/>
                 <a:ea typeface="微軟正黑體" pitchFamily="34" charset="-120"/>
               </a:rPr>
-              <a:t>有</a:t>
-            </a:r>
-            <a:r>
-              <a:rPr lang="zh-TW" altLang="en-US" sz="6400" b="1" dirty="0">
-                <a:solidFill>
-                  <a:srgbClr val="660033"/>
-                </a:solidFill>
-                <a:effectLst/>
-                <a:latin typeface="微軟正黑體" pitchFamily="34" charset="-120"/>
-                <a:ea typeface="微軟正黑體" pitchFamily="34" charset="-120"/>
-              </a:rPr>
-              <a:t>祢 </a:t>
-            </a:r>
-            <a:r>
-              <a:rPr lang="zh-TW" altLang="en-US" sz="6400" b="1" dirty="0">
-                <a:solidFill>
-                  <a:srgbClr val="660033"/>
-                </a:solidFill>
-                <a:effectLst/>
-                <a:latin typeface="微軟正黑體" pitchFamily="34" charset="-120"/>
-                <a:ea typeface="微軟正黑體" pitchFamily="34" charset="-120"/>
-              </a:rPr>
-              <a:t> 我</a:t>
-            </a:r>
-            <a:r>
-              <a:rPr lang="zh-TW" altLang="en-US" sz="6400" b="1" dirty="0">
-                <a:solidFill>
-                  <a:srgbClr val="660033"/>
-                </a:solidFill>
-                <a:effectLst/>
-                <a:latin typeface="微軟正黑體" pitchFamily="34" charset="-120"/>
-                <a:ea typeface="微軟正黑體" pitchFamily="34" charset="-120"/>
-              </a:rPr>
-              <a:t>有滿足的喜樂</a:t>
+              <a:t>有祢  我有滿足的喜樂</a:t>
             </a:r>
             <a:endParaRPr lang="en-US" altLang="zh-TW" sz="6400" b="1" dirty="0">
               <a:solidFill>
@@ -3603,8 +3446,8 @@
         </p:nvSpPr>
         <p:spPr>
           <a:xfrm>
-            <a:off x="13653" y="5270432"/>
-            <a:ext cx="12178347" cy="830997"/>
+            <a:off x="13653" y="5331987"/>
+            <a:ext cx="12178347" cy="707886"/>
           </a:xfrm>
           <a:prstGeom prst="rect">
             <a:avLst/>
@@ -3619,44 +3462,39 @@
           <a:p>
             <a:pPr algn="ctr"/>
             <a:r>
-              <a:rPr lang="en-US" sz="4800" b="1" dirty="0">
+              <a:rPr lang="en-US" sz="4000" b="1" dirty="0">
                 <a:solidFill>
                   <a:srgbClr val="660033"/>
                 </a:solidFill>
-                <a:effectLst/>
                 <a:latin typeface="Microsoft JhengHei" panose="020B0604030504040204" pitchFamily="34" charset="-120"/>
                 <a:ea typeface="Microsoft JhengHei" panose="020B0604030504040204" pitchFamily="34" charset="-120"/>
               </a:rPr>
               <a:t>( </a:t>
             </a:r>
             <a:r>
-              <a:rPr lang="zh-CN" altLang="en-US" sz="4800" b="1" dirty="0">
+              <a:rPr lang="zh-CN" altLang="en-US" sz="4000" b="1" dirty="0">
                 <a:solidFill>
                   <a:srgbClr val="660033"/>
                 </a:solidFill>
-                <a:effectLst/>
                 <a:latin typeface="Microsoft JhengHei" panose="020B0604030504040204" pitchFamily="34" charset="-120"/>
                 <a:ea typeface="Microsoft JhengHei" panose="020B0604030504040204" pitchFamily="34" charset="-120"/>
               </a:rPr>
-              <a:t>正</a:t>
-            </a:r>
-            <a:r>
-              <a:rPr lang="en-US" sz="4800" b="1" dirty="0">
+              <a:t>正歌</a:t>
+            </a:r>
+            <a:r>
+              <a:rPr lang="en-US" sz="4000" b="1" dirty="0">
                 <a:solidFill>
                   <a:srgbClr val="660033"/>
                 </a:solidFill>
-                <a:effectLst/>
                 <a:latin typeface="Microsoft JhengHei" panose="020B0604030504040204" pitchFamily="34" charset="-120"/>
                 <a:ea typeface="Microsoft JhengHei" panose="020B0604030504040204" pitchFamily="34" charset="-120"/>
               </a:rPr>
               <a:t> )</a:t>
             </a:r>
-            <a:endParaRPr lang="vi-VN" sz="4800" b="1" dirty="0">
+            <a:endParaRPr lang="vi-VN" sz="4000" b="1" dirty="0">
               <a:solidFill>
                 <a:srgbClr val="660033"/>
               </a:solidFill>
-              <a:effectLst/>
-              <a:latin typeface="Microsoft JhengHei" panose="020B0604030504040204" pitchFamily="34" charset="-120"/>
               <a:ea typeface="Microsoft JhengHei" panose="020B0604030504040204" pitchFamily="34" charset="-120"/>
             </a:endParaRPr>
           </a:p>
@@ -3726,40 +3564,7 @@
                 <a:latin typeface="微軟正黑體" pitchFamily="34" charset="-120"/>
                 <a:ea typeface="微軟正黑體" pitchFamily="34" charset="-120"/>
               </a:rPr>
-              <a:t>我在 </a:t>
-            </a:r>
-            <a:r>
-              <a:rPr lang="zh-TW" altLang="en-US" sz="6400" b="1" dirty="0">
-                <a:solidFill>
-                  <a:srgbClr val="660033"/>
-                </a:solidFill>
-                <a:effectLst/>
-                <a:latin typeface="微軟正黑體" pitchFamily="34" charset="-120"/>
-                <a:ea typeface="微軟正黑體" pitchFamily="34" charset="-120"/>
-              </a:rPr>
-              <a:t> 深</a:t>
-            </a:r>
-            <a:r>
-              <a:rPr lang="zh-TW" altLang="en-US" sz="6400" b="1" dirty="0">
-                <a:solidFill>
-                  <a:srgbClr val="660033"/>
-                </a:solidFill>
-                <a:effectLst/>
-                <a:latin typeface="微軟正黑體" pitchFamily="34" charset="-120"/>
-                <a:ea typeface="微軟正黑體" pitchFamily="34" charset="-120"/>
-              </a:rPr>
-              <a:t>處裡求告</a:t>
-            </a:r>
-            <a:r>
-              <a:rPr lang="zh-TW" altLang="en-US" sz="6400" b="1" dirty="0">
-                <a:solidFill>
-                  <a:srgbClr val="660033"/>
-                </a:solidFill>
-                <a:effectLst/>
-                <a:latin typeface="微軟正黑體" pitchFamily="34" charset="-120"/>
-                <a:ea typeface="微軟正黑體" pitchFamily="34" charset="-120"/>
-              </a:rPr>
-              <a:t>祢</a:t>
+              <a:t>我在  深處裡求告祢</a:t>
             </a:r>
             <a:endParaRPr lang="en-US" altLang="zh-TW" sz="6400" b="1" dirty="0">
               <a:solidFill>
@@ -3783,40 +3588,7 @@
                 <a:latin typeface="微軟正黑體" pitchFamily="34" charset="-120"/>
                 <a:ea typeface="微軟正黑體" pitchFamily="34" charset="-120"/>
               </a:rPr>
-              <a:t>祢</a:t>
-            </a:r>
-            <a:r>
-              <a:rPr lang="zh-TW" altLang="en-US" sz="6400" b="1" dirty="0">
-                <a:solidFill>
-                  <a:srgbClr val="660033"/>
-                </a:solidFill>
-                <a:effectLst/>
-                <a:latin typeface="微軟正黑體" pitchFamily="34" charset="-120"/>
-                <a:ea typeface="微軟正黑體" pitchFamily="34" charset="-120"/>
-              </a:rPr>
-              <a:t>在 </a:t>
-            </a:r>
-            <a:r>
-              <a:rPr lang="zh-TW" altLang="en-US" sz="6400" b="1" dirty="0">
-                <a:solidFill>
-                  <a:srgbClr val="660033"/>
-                </a:solidFill>
-                <a:effectLst/>
-                <a:latin typeface="微軟正黑體" pitchFamily="34" charset="-120"/>
-                <a:ea typeface="微軟正黑體" pitchFamily="34" charset="-120"/>
-              </a:rPr>
-              <a:t> 天</a:t>
-            </a:r>
-            <a:r>
-              <a:rPr lang="zh-TW" altLang="en-US" sz="6400" b="1" dirty="0">
-                <a:solidFill>
-                  <a:srgbClr val="660033"/>
-                </a:solidFill>
-                <a:effectLst/>
-                <a:latin typeface="微軟正黑體" pitchFamily="34" charset="-120"/>
-                <a:ea typeface="微軟正黑體" pitchFamily="34" charset="-120"/>
-              </a:rPr>
-              <a:t>上聽我禱告</a:t>
+              <a:t>祢在  天上聽我禱告</a:t>
             </a:r>
             <a:endParaRPr lang="en-US" altLang="zh-TW" sz="6400" b="1" dirty="0">
               <a:solidFill>
@@ -3837,8 +3609,8 @@
         </p:nvSpPr>
         <p:spPr>
           <a:xfrm>
-            <a:off x="13653" y="5270432"/>
-            <a:ext cx="12178347" cy="830997"/>
+            <a:off x="13653" y="5331987"/>
+            <a:ext cx="12178347" cy="707886"/>
           </a:xfrm>
           <a:prstGeom prst="rect">
             <a:avLst/>
@@ -3853,44 +3625,39 @@
           <a:p>
             <a:pPr algn="ctr"/>
             <a:r>
-              <a:rPr lang="en-US" sz="4800" b="1" dirty="0">
+              <a:rPr lang="en-US" sz="4000" b="1" dirty="0">
                 <a:solidFill>
                   <a:srgbClr val="660033"/>
                 </a:solidFill>
-                <a:effectLst/>
                 <a:latin typeface="Microsoft JhengHei" panose="020B0604030504040204" pitchFamily="34" charset="-120"/>
                 <a:ea typeface="Microsoft JhengHei" panose="020B0604030504040204" pitchFamily="34" charset="-120"/>
               </a:rPr>
               <a:t>( </a:t>
             </a:r>
             <a:r>
-              <a:rPr lang="zh-CN" altLang="en-US" sz="4800" b="1" dirty="0">
+              <a:rPr lang="zh-CN" altLang="en-US" sz="4000" b="1" dirty="0">
                 <a:solidFill>
                   <a:srgbClr val="660033"/>
                 </a:solidFill>
-                <a:effectLst/>
                 <a:latin typeface="Microsoft JhengHei" panose="020B0604030504040204" pitchFamily="34" charset="-120"/>
                 <a:ea typeface="Microsoft JhengHei" panose="020B0604030504040204" pitchFamily="34" charset="-120"/>
               </a:rPr>
-              <a:t>正</a:t>
-            </a:r>
-            <a:r>
-              <a:rPr lang="en-US" sz="4800" b="1" dirty="0">
+              <a:t>正歌</a:t>
+            </a:r>
+            <a:r>
+              <a:rPr lang="en-US" sz="4000" b="1" dirty="0">
                 <a:solidFill>
                   <a:srgbClr val="660033"/>
                 </a:solidFill>
-                <a:effectLst/>
                 <a:latin typeface="Microsoft JhengHei" panose="020B0604030504040204" pitchFamily="34" charset="-120"/>
                 <a:ea typeface="Microsoft JhengHei" panose="020B0604030504040204" pitchFamily="34" charset="-120"/>
               </a:rPr>
               <a:t> )</a:t>
             </a:r>
-            <a:endParaRPr lang="vi-VN" sz="4800" b="1" dirty="0">
+            <a:endParaRPr lang="vi-VN" sz="4000" b="1" dirty="0">
               <a:solidFill>
                 <a:srgbClr val="660033"/>
               </a:solidFill>
-              <a:effectLst/>
-              <a:latin typeface="Microsoft JhengHei" panose="020B0604030504040204" pitchFamily="34" charset="-120"/>
               <a:ea typeface="Microsoft JhengHei" panose="020B0604030504040204" pitchFamily="34" charset="-120"/>
             </a:endParaRPr>
           </a:p>
@@ -3960,40 +3727,7 @@
                 <a:latin typeface="微軟正黑體" pitchFamily="34" charset="-120"/>
                 <a:ea typeface="微軟正黑體" pitchFamily="34" charset="-120"/>
               </a:rPr>
-              <a:t>祢是 </a:t>
-            </a:r>
-            <a:r>
-              <a:rPr lang="zh-TW" altLang="en-US" sz="6400" b="1" dirty="0">
-                <a:solidFill>
-                  <a:srgbClr val="660033"/>
-                </a:solidFill>
-                <a:effectLst/>
-                <a:latin typeface="微軟正黑體" pitchFamily="34" charset="-120"/>
-                <a:ea typeface="微軟正黑體" pitchFamily="34" charset="-120"/>
-              </a:rPr>
-              <a:t> 我</a:t>
-            </a:r>
-            <a:r>
-              <a:rPr lang="zh-TW" altLang="en-US" sz="6400" b="1" dirty="0">
-                <a:solidFill>
-                  <a:srgbClr val="660033"/>
-                </a:solidFill>
-                <a:effectLst/>
-                <a:latin typeface="微軟正黑體" pitchFamily="34" charset="-120"/>
-                <a:ea typeface="微軟正黑體" pitchFamily="34" charset="-120"/>
-              </a:rPr>
-              <a:t>堅固避難</a:t>
-            </a:r>
-            <a:r>
-              <a:rPr lang="zh-TW" altLang="en-US" sz="6400" b="1" dirty="0">
-                <a:solidFill>
-                  <a:srgbClr val="660033"/>
-                </a:solidFill>
-                <a:effectLst/>
-                <a:latin typeface="微軟正黑體" pitchFamily="34" charset="-120"/>
-                <a:ea typeface="微軟正黑體" pitchFamily="34" charset="-120"/>
-              </a:rPr>
-              <a:t>所</a:t>
+              <a:t>祢是  我堅固避難所</a:t>
             </a:r>
             <a:endParaRPr lang="en-US" altLang="zh-TW" sz="6400" b="1" dirty="0">
               <a:solidFill>
@@ -4017,18 +3751,7 @@
                 <a:latin typeface="微軟正黑體" pitchFamily="34" charset="-120"/>
                 <a:ea typeface="微軟正黑體" pitchFamily="34" charset="-120"/>
               </a:rPr>
-              <a:t>我</a:t>
-            </a:r>
-            <a:r>
-              <a:rPr lang="zh-TW" altLang="en-US" sz="6400" b="1" dirty="0">
-                <a:solidFill>
-                  <a:srgbClr val="660033"/>
-                </a:solidFill>
-                <a:effectLst/>
-                <a:latin typeface="微軟正黑體" pitchFamily="34" charset="-120"/>
-                <a:ea typeface="微軟正黑體" pitchFamily="34" charset="-120"/>
-              </a:rPr>
-              <a:t>讚美祢直到永遠</a:t>
+              <a:t>我讚美祢直到永遠</a:t>
             </a:r>
             <a:endParaRPr lang="en-US" altLang="zh-TW" sz="6400" b="1" dirty="0">
               <a:solidFill>
@@ -4049,8 +3772,8 @@
         </p:nvSpPr>
         <p:spPr>
           <a:xfrm>
-            <a:off x="13653" y="5270432"/>
-            <a:ext cx="12178347" cy="830997"/>
+            <a:off x="13653" y="5331987"/>
+            <a:ext cx="12178347" cy="707886"/>
           </a:xfrm>
           <a:prstGeom prst="rect">
             <a:avLst/>
@@ -4065,44 +3788,39 @@
           <a:p>
             <a:pPr algn="ctr"/>
             <a:r>
-              <a:rPr lang="en-US" sz="4800" b="1" dirty="0">
+              <a:rPr lang="en-US" sz="4000" b="1" dirty="0">
                 <a:solidFill>
                   <a:srgbClr val="660033"/>
                 </a:solidFill>
-                <a:effectLst/>
                 <a:latin typeface="Microsoft JhengHei" panose="020B0604030504040204" pitchFamily="34" charset="-120"/>
                 <a:ea typeface="Microsoft JhengHei" panose="020B0604030504040204" pitchFamily="34" charset="-120"/>
               </a:rPr>
               <a:t>( </a:t>
             </a:r>
             <a:r>
-              <a:rPr lang="zh-CN" altLang="en-US" sz="4800" b="1" dirty="0">
+              <a:rPr lang="zh-CN" altLang="en-US" sz="4000" b="1" dirty="0">
                 <a:solidFill>
                   <a:srgbClr val="660033"/>
                 </a:solidFill>
-                <a:effectLst/>
                 <a:latin typeface="Microsoft JhengHei" panose="020B0604030504040204" pitchFamily="34" charset="-120"/>
                 <a:ea typeface="Microsoft JhengHei" panose="020B0604030504040204" pitchFamily="34" charset="-120"/>
               </a:rPr>
-              <a:t>正</a:t>
-            </a:r>
-            <a:r>
-              <a:rPr lang="en-US" sz="4800" b="1" dirty="0">
+              <a:t>正歌</a:t>
+            </a:r>
+            <a:r>
+              <a:rPr lang="en-US" sz="4000" b="1" dirty="0">
                 <a:solidFill>
                   <a:srgbClr val="660033"/>
                 </a:solidFill>
-                <a:effectLst/>
                 <a:latin typeface="Microsoft JhengHei" panose="020B0604030504040204" pitchFamily="34" charset="-120"/>
                 <a:ea typeface="Microsoft JhengHei" panose="020B0604030504040204" pitchFamily="34" charset="-120"/>
               </a:rPr>
               <a:t> )</a:t>
             </a:r>
-            <a:endParaRPr lang="vi-VN" sz="4800" b="1" dirty="0">
+            <a:endParaRPr lang="vi-VN" sz="4000" b="1" dirty="0">
               <a:solidFill>
                 <a:srgbClr val="660033"/>
               </a:solidFill>
-              <a:effectLst/>
-              <a:latin typeface="Microsoft JhengHei" panose="020B0604030504040204" pitchFamily="34" charset="-120"/>
               <a:ea typeface="Microsoft JhengHei" panose="020B0604030504040204" pitchFamily="34" charset="-120"/>
             </a:endParaRPr>
           </a:p>
@@ -4172,40 +3890,7 @@
                 <a:latin typeface="微軟正黑體" pitchFamily="34" charset="-120"/>
                 <a:ea typeface="微軟正黑體" pitchFamily="34" charset="-120"/>
               </a:rPr>
-              <a:t>太陽還存 </a:t>
-            </a:r>
-            <a:r>
-              <a:rPr lang="zh-TW" altLang="en-US" sz="6400" b="1" dirty="0">
-                <a:solidFill>
-                  <a:srgbClr val="660033"/>
-                </a:solidFill>
-                <a:effectLst/>
-                <a:latin typeface="微軟正黑體" pitchFamily="34" charset="-120"/>
-                <a:ea typeface="微軟正黑體" pitchFamily="34" charset="-120"/>
-              </a:rPr>
-              <a:t> 月</a:t>
-            </a:r>
-            <a:r>
-              <a:rPr lang="zh-TW" altLang="en-US" sz="6400" b="1" dirty="0">
-                <a:solidFill>
-                  <a:srgbClr val="660033"/>
-                </a:solidFill>
-                <a:effectLst/>
-                <a:latin typeface="微軟正黑體" pitchFamily="34" charset="-120"/>
-                <a:ea typeface="微軟正黑體" pitchFamily="34" charset="-120"/>
-              </a:rPr>
-              <a:t>亮還</a:t>
-            </a:r>
-            <a:r>
-              <a:rPr lang="zh-TW" altLang="en-US" sz="6400" b="1" dirty="0">
-                <a:solidFill>
-                  <a:srgbClr val="660033"/>
-                </a:solidFill>
-                <a:effectLst/>
-                <a:latin typeface="微軟正黑體" pitchFamily="34" charset="-120"/>
-                <a:ea typeface="微軟正黑體" pitchFamily="34" charset="-120"/>
-              </a:rPr>
-              <a:t>在</a:t>
+              <a:t>太陽還存  月亮還在</a:t>
             </a:r>
             <a:endParaRPr lang="en-US" altLang="zh-TW" sz="6400" b="1" dirty="0">
               <a:solidFill>
@@ -4229,18 +3914,7 @@
                 <a:latin typeface="微軟正黑體" pitchFamily="34" charset="-120"/>
                 <a:ea typeface="微軟正黑體" pitchFamily="34" charset="-120"/>
               </a:rPr>
-              <a:t>人</a:t>
-            </a:r>
-            <a:r>
-              <a:rPr lang="zh-TW" altLang="en-US" sz="6400" b="1" dirty="0">
-                <a:solidFill>
-                  <a:srgbClr val="660033"/>
-                </a:solidFill>
-                <a:effectLst/>
-                <a:latin typeface="微軟正黑體" pitchFamily="34" charset="-120"/>
-                <a:ea typeface="微軟正黑體" pitchFamily="34" charset="-120"/>
-              </a:rPr>
-              <a:t>要敬畏祢直到萬代</a:t>
+              <a:t>人要敬畏祢直到萬代</a:t>
             </a:r>
             <a:endParaRPr lang="en-US" altLang="zh-TW" sz="6400" b="1" dirty="0">
               <a:solidFill>
@@ -4261,8 +3935,8 @@
         </p:nvSpPr>
         <p:spPr>
           <a:xfrm>
-            <a:off x="13653" y="5270432"/>
-            <a:ext cx="12178347" cy="830997"/>
+            <a:off x="13653" y="5331987"/>
+            <a:ext cx="12178347" cy="707886"/>
           </a:xfrm>
           <a:prstGeom prst="rect">
             <a:avLst/>
@@ -4277,55 +3951,39 @@
           <a:p>
             <a:pPr algn="ctr"/>
             <a:r>
-              <a:rPr lang="en-US" sz="4800" b="1" dirty="0">
+              <a:rPr lang="en-US" sz="4000" b="1" dirty="0">
                 <a:solidFill>
                   <a:srgbClr val="660033"/>
                 </a:solidFill>
-                <a:effectLst/>
                 <a:latin typeface="Microsoft JhengHei" panose="020B0604030504040204" pitchFamily="34" charset="-120"/>
                 <a:ea typeface="Microsoft JhengHei" panose="020B0604030504040204" pitchFamily="34" charset="-120"/>
               </a:rPr>
               <a:t>( </a:t>
             </a:r>
             <a:r>
-              <a:rPr lang="zh-CN" altLang="en-US" sz="4800" b="1" dirty="0">
+              <a:rPr lang="zh-CN" altLang="en-US" sz="4000" b="1" dirty="0">
                 <a:solidFill>
                   <a:srgbClr val="660033"/>
                 </a:solidFill>
-                <a:effectLst/>
                 <a:latin typeface="Microsoft JhengHei" panose="020B0604030504040204" pitchFamily="34" charset="-120"/>
                 <a:ea typeface="Microsoft JhengHei" panose="020B0604030504040204" pitchFamily="34" charset="-120"/>
               </a:rPr>
-              <a:t>副</a:t>
-            </a:r>
-            <a:r>
-              <a:rPr lang="en-US" sz="4800" b="1" dirty="0">
+              <a:t>副歌</a:t>
+            </a:r>
+            <a:r>
+              <a:rPr lang="en-US" sz="4000" b="1" dirty="0">
                 <a:solidFill>
                   <a:srgbClr val="660033"/>
                 </a:solidFill>
-                <a:effectLst/>
                 <a:latin typeface="Microsoft JhengHei" panose="020B0604030504040204" pitchFamily="34" charset="-120"/>
                 <a:ea typeface="Microsoft JhengHei" panose="020B0604030504040204" pitchFamily="34" charset="-120"/>
               </a:rPr>
-              <a:t> </a:t>
-            </a:r>
-            <a:r>
-              <a:rPr lang="en-US" sz="4800" b="1" dirty="0">
-                <a:solidFill>
-                  <a:srgbClr val="660033"/>
-                </a:solidFill>
-                <a:effectLst/>
-                <a:latin typeface="Microsoft JhengHei" panose="020B0604030504040204" pitchFamily="34" charset="-120"/>
-                <a:ea typeface="Microsoft JhengHei" panose="020B0604030504040204" pitchFamily="34" charset="-120"/>
-              </a:rPr>
-              <a:t>)</a:t>
-            </a:r>
-            <a:endParaRPr lang="vi-VN" sz="4800" b="1" dirty="0">
+              <a:t> )</a:t>
+            </a:r>
+            <a:endParaRPr lang="vi-VN" sz="4000" b="1" dirty="0">
               <a:solidFill>
                 <a:srgbClr val="660033"/>
               </a:solidFill>
-              <a:effectLst/>
-              <a:latin typeface="Microsoft JhengHei" panose="020B0604030504040204" pitchFamily="34" charset="-120"/>
               <a:ea typeface="Microsoft JhengHei" panose="020B0604030504040204" pitchFamily="34" charset="-120"/>
             </a:endParaRPr>
           </a:p>
@@ -4395,18 +4053,7 @@
                 <a:latin typeface="微軟正黑體" pitchFamily="34" charset="-120"/>
                 <a:ea typeface="微軟正黑體" pitchFamily="34" charset="-120"/>
               </a:rPr>
-              <a:t>我從前風聞有</a:t>
-            </a:r>
-            <a:r>
-              <a:rPr lang="zh-TW" altLang="en-US" sz="6400" b="1" dirty="0">
-                <a:solidFill>
-                  <a:srgbClr val="660033"/>
-                </a:solidFill>
-                <a:effectLst/>
-                <a:latin typeface="微軟正黑體" pitchFamily="34" charset="-120"/>
-                <a:ea typeface="微軟正黑體" pitchFamily="34" charset="-120"/>
-              </a:rPr>
-              <a:t>祢</a:t>
+              <a:t>我從前風聞有祢</a:t>
             </a:r>
             <a:endParaRPr lang="en-US" altLang="zh-TW" sz="6400" b="1" dirty="0">
               <a:solidFill>
@@ -4430,18 +4077,7 @@
                 <a:latin typeface="微軟正黑體" pitchFamily="34" charset="-120"/>
                 <a:ea typeface="微軟正黑體" pitchFamily="34" charset="-120"/>
               </a:rPr>
-              <a:t>現</a:t>
-            </a:r>
-            <a:r>
-              <a:rPr lang="zh-TW" altLang="en-US" sz="6400" b="1" dirty="0">
-                <a:solidFill>
-                  <a:srgbClr val="660033"/>
-                </a:solidFill>
-                <a:effectLst/>
-                <a:latin typeface="微軟正黑體" pitchFamily="34" charset="-120"/>
-                <a:ea typeface="微軟正黑體" pitchFamily="34" charset="-120"/>
-              </a:rPr>
-              <a:t>在我親眼看見祢</a:t>
+              <a:t>現在我親眼看見祢</a:t>
             </a:r>
             <a:endParaRPr lang="en-US" altLang="zh-TW" sz="6400" b="1" dirty="0">
               <a:solidFill>
@@ -4462,8 +4098,8 @@
         </p:nvSpPr>
         <p:spPr>
           <a:xfrm>
-            <a:off x="13653" y="5270432"/>
-            <a:ext cx="12178347" cy="830997"/>
+            <a:off x="13653" y="5331987"/>
+            <a:ext cx="12178347" cy="707886"/>
           </a:xfrm>
           <a:prstGeom prst="rect">
             <a:avLst/>
@@ -4478,55 +4114,39 @@
           <a:p>
             <a:pPr algn="ctr"/>
             <a:r>
-              <a:rPr lang="en-US" sz="4800" b="1" dirty="0">
+              <a:rPr lang="en-US" sz="4000" b="1" dirty="0">
                 <a:solidFill>
                   <a:srgbClr val="660033"/>
                 </a:solidFill>
-                <a:effectLst/>
                 <a:latin typeface="Microsoft JhengHei" panose="020B0604030504040204" pitchFamily="34" charset="-120"/>
                 <a:ea typeface="Microsoft JhengHei" panose="020B0604030504040204" pitchFamily="34" charset="-120"/>
               </a:rPr>
               <a:t>( </a:t>
             </a:r>
             <a:r>
-              <a:rPr lang="zh-CN" altLang="en-US" sz="4800" b="1" dirty="0">
+              <a:rPr lang="zh-CN" altLang="en-US" sz="4000" b="1" dirty="0">
                 <a:solidFill>
                   <a:srgbClr val="660033"/>
                 </a:solidFill>
-                <a:effectLst/>
                 <a:latin typeface="Microsoft JhengHei" panose="020B0604030504040204" pitchFamily="34" charset="-120"/>
                 <a:ea typeface="Microsoft JhengHei" panose="020B0604030504040204" pitchFamily="34" charset="-120"/>
               </a:rPr>
-              <a:t>副</a:t>
-            </a:r>
-            <a:r>
-              <a:rPr lang="en-US" sz="4800" b="1" dirty="0">
+              <a:t>副歌</a:t>
+            </a:r>
+            <a:r>
+              <a:rPr lang="en-US" sz="4000" b="1" dirty="0">
                 <a:solidFill>
                   <a:srgbClr val="660033"/>
                 </a:solidFill>
-                <a:effectLst/>
                 <a:latin typeface="Microsoft JhengHei" panose="020B0604030504040204" pitchFamily="34" charset="-120"/>
                 <a:ea typeface="Microsoft JhengHei" panose="020B0604030504040204" pitchFamily="34" charset="-120"/>
               </a:rPr>
-              <a:t> </a:t>
-            </a:r>
-            <a:r>
-              <a:rPr lang="en-US" sz="4800" b="1" dirty="0">
-                <a:solidFill>
-                  <a:srgbClr val="660033"/>
-                </a:solidFill>
-                <a:effectLst/>
-                <a:latin typeface="Microsoft JhengHei" panose="020B0604030504040204" pitchFamily="34" charset="-120"/>
-                <a:ea typeface="Microsoft JhengHei" panose="020B0604030504040204" pitchFamily="34" charset="-120"/>
-              </a:rPr>
-              <a:t>)</a:t>
-            </a:r>
-            <a:endParaRPr lang="vi-VN" sz="4800" b="1" dirty="0">
+              <a:t> )</a:t>
+            </a:r>
+            <a:endParaRPr lang="vi-VN" sz="4000" b="1" dirty="0">
               <a:solidFill>
                 <a:srgbClr val="660033"/>
               </a:solidFill>
-              <a:effectLst/>
-              <a:latin typeface="Microsoft JhengHei" panose="020B0604030504040204" pitchFamily="34" charset="-120"/>
               <a:ea typeface="Microsoft JhengHei" panose="020B0604030504040204" pitchFamily="34" charset="-120"/>
             </a:endParaRPr>
           </a:p>

--- a/親眼看見你.pptx
+++ b/親眼看見你.pptx
@@ -299,7 +299,7 @@
           <a:p>
             <a:fld id="{ABE69DC5-1037-40C5-BA52-B49D5C60A905}" type="datetimeFigureOut">
               <a:rPr lang="vi-VN" smtClean="0"/>
-              <a:t>16/03/2024</a:t>
+              <a:t>13/07/2024</a:t>
             </a:fld>
             <a:endParaRPr lang="vi-VN"/>
           </a:p>
@@ -469,7 +469,7 @@
           <a:p>
             <a:fld id="{ABE69DC5-1037-40C5-BA52-B49D5C60A905}" type="datetimeFigureOut">
               <a:rPr lang="vi-VN" smtClean="0"/>
-              <a:t>16/03/2024</a:t>
+              <a:t>13/07/2024</a:t>
             </a:fld>
             <a:endParaRPr lang="vi-VN"/>
           </a:p>
@@ -649,7 +649,7 @@
           <a:p>
             <a:fld id="{ABE69DC5-1037-40C5-BA52-B49D5C60A905}" type="datetimeFigureOut">
               <a:rPr lang="vi-VN" smtClean="0"/>
-              <a:t>16/03/2024</a:t>
+              <a:t>13/07/2024</a:t>
             </a:fld>
             <a:endParaRPr lang="vi-VN"/>
           </a:p>
@@ -819,7 +819,7 @@
           <a:p>
             <a:fld id="{ABE69DC5-1037-40C5-BA52-B49D5C60A905}" type="datetimeFigureOut">
               <a:rPr lang="vi-VN" smtClean="0"/>
-              <a:t>16/03/2024</a:t>
+              <a:t>13/07/2024</a:t>
             </a:fld>
             <a:endParaRPr lang="vi-VN"/>
           </a:p>
@@ -1065,7 +1065,7 @@
           <a:p>
             <a:fld id="{ABE69DC5-1037-40C5-BA52-B49D5C60A905}" type="datetimeFigureOut">
               <a:rPr lang="vi-VN" smtClean="0"/>
-              <a:t>16/03/2024</a:t>
+              <a:t>13/07/2024</a:t>
             </a:fld>
             <a:endParaRPr lang="vi-VN"/>
           </a:p>
@@ -1353,7 +1353,7 @@
           <a:p>
             <a:fld id="{ABE69DC5-1037-40C5-BA52-B49D5C60A905}" type="datetimeFigureOut">
               <a:rPr lang="vi-VN" smtClean="0"/>
-              <a:t>16/03/2024</a:t>
+              <a:t>13/07/2024</a:t>
             </a:fld>
             <a:endParaRPr lang="vi-VN"/>
           </a:p>
@@ -1775,7 +1775,7 @@
           <a:p>
             <a:fld id="{ABE69DC5-1037-40C5-BA52-B49D5C60A905}" type="datetimeFigureOut">
               <a:rPr lang="vi-VN" smtClean="0"/>
-              <a:t>16/03/2024</a:t>
+              <a:t>13/07/2024</a:t>
             </a:fld>
             <a:endParaRPr lang="vi-VN"/>
           </a:p>
@@ -1893,7 +1893,7 @@
           <a:p>
             <a:fld id="{ABE69DC5-1037-40C5-BA52-B49D5C60A905}" type="datetimeFigureOut">
               <a:rPr lang="vi-VN" smtClean="0"/>
-              <a:t>16/03/2024</a:t>
+              <a:t>13/07/2024</a:t>
             </a:fld>
             <a:endParaRPr lang="vi-VN"/>
           </a:p>
@@ -1988,7 +1988,7 @@
           <a:p>
             <a:fld id="{ABE69DC5-1037-40C5-BA52-B49D5C60A905}" type="datetimeFigureOut">
               <a:rPr lang="vi-VN" smtClean="0"/>
-              <a:t>16/03/2024</a:t>
+              <a:t>13/07/2024</a:t>
             </a:fld>
             <a:endParaRPr lang="vi-VN"/>
           </a:p>
@@ -2265,7 +2265,7 @@
           <a:p>
             <a:fld id="{ABE69DC5-1037-40C5-BA52-B49D5C60A905}" type="datetimeFigureOut">
               <a:rPr lang="vi-VN" smtClean="0"/>
-              <a:t>16/03/2024</a:t>
+              <a:t>13/07/2024</a:t>
             </a:fld>
             <a:endParaRPr lang="vi-VN"/>
           </a:p>
@@ -2522,7 +2522,7 @@
           <a:p>
             <a:fld id="{ABE69DC5-1037-40C5-BA52-B49D5C60A905}" type="datetimeFigureOut">
               <a:rPr lang="vi-VN" smtClean="0"/>
-              <a:t>16/03/2024</a:t>
+              <a:t>13/07/2024</a:t>
             </a:fld>
             <a:endParaRPr lang="vi-VN"/>
           </a:p>
@@ -2738,7 +2738,7 @@
           <a:p>
             <a:fld id="{ABE69DC5-1037-40C5-BA52-B49D5C60A905}" type="datetimeFigureOut">
               <a:rPr lang="vi-VN" smtClean="0"/>
-              <a:t>16/03/2024</a:t>
+              <a:t>13/07/2024</a:t>
             </a:fld>
             <a:endParaRPr lang="vi-VN"/>
           </a:p>
@@ -3278,8 +3278,8 @@
         </p:nvSpPr>
         <p:spPr>
           <a:xfrm>
-            <a:off x="13653" y="5331987"/>
-            <a:ext cx="12178347" cy="707886"/>
+            <a:off x="13653" y="5362764"/>
+            <a:ext cx="12178347" cy="646331"/>
           </a:xfrm>
           <a:prstGeom prst="rect">
             <a:avLst/>
@@ -3294,7 +3294,7 @@
           <a:p>
             <a:pPr algn="ctr"/>
             <a:r>
-              <a:rPr lang="en-US" sz="4000" b="1" dirty="0">
+              <a:rPr lang="en-US" sz="3600" b="1" dirty="0">
                 <a:solidFill>
                   <a:srgbClr val="660033"/>
                 </a:solidFill>
@@ -3305,7 +3305,7 @@
               <a:t>( </a:t>
             </a:r>
             <a:r>
-              <a:rPr lang="zh-CN" altLang="en-US" sz="4000" b="1" dirty="0">
+              <a:rPr lang="zh-CN" altLang="en-US" sz="3600" b="1" dirty="0">
                 <a:solidFill>
                   <a:srgbClr val="660033"/>
                 </a:solidFill>
@@ -3316,7 +3316,7 @@
               <a:t>正歌</a:t>
             </a:r>
             <a:r>
-              <a:rPr lang="en-US" sz="4000" b="1" dirty="0">
+              <a:rPr lang="en-US" sz="3600" b="1" dirty="0">
                 <a:solidFill>
                   <a:srgbClr val="660033"/>
                 </a:solidFill>
@@ -3326,7 +3326,7 @@
               </a:rPr>
               <a:t> )</a:t>
             </a:r>
-            <a:endParaRPr lang="vi-VN" sz="4000" b="1" dirty="0">
+            <a:endParaRPr lang="vi-VN" sz="3600" b="1" dirty="0">
               <a:solidFill>
                 <a:srgbClr val="660033"/>
               </a:solidFill>
@@ -3446,8 +3446,8 @@
         </p:nvSpPr>
         <p:spPr>
           <a:xfrm>
-            <a:off x="13653" y="5331987"/>
-            <a:ext cx="12178347" cy="707886"/>
+            <a:off x="13653" y="5362764"/>
+            <a:ext cx="12178347" cy="646331"/>
           </a:xfrm>
           <a:prstGeom prst="rect">
             <a:avLst/>
@@ -3462,7 +3462,7 @@
           <a:p>
             <a:pPr algn="ctr"/>
             <a:r>
-              <a:rPr lang="en-US" sz="4000" b="1" dirty="0">
+              <a:rPr lang="en-US" sz="3600" b="1" dirty="0">
                 <a:solidFill>
                   <a:srgbClr val="660033"/>
                 </a:solidFill>
@@ -3472,7 +3472,7 @@
               <a:t>( </a:t>
             </a:r>
             <a:r>
-              <a:rPr lang="zh-CN" altLang="en-US" sz="4000" b="1" dirty="0">
+              <a:rPr lang="zh-CN" altLang="en-US" sz="3600" b="1" dirty="0">
                 <a:solidFill>
                   <a:srgbClr val="660033"/>
                 </a:solidFill>
@@ -3482,7 +3482,7 @@
               <a:t>正歌</a:t>
             </a:r>
             <a:r>
-              <a:rPr lang="en-US" sz="4000" b="1" dirty="0">
+              <a:rPr lang="en-US" sz="3600" b="1" dirty="0">
                 <a:solidFill>
                   <a:srgbClr val="660033"/>
                 </a:solidFill>
@@ -3491,7 +3491,7 @@
               </a:rPr>
               <a:t> )</a:t>
             </a:r>
-            <a:endParaRPr lang="vi-VN" sz="4000" b="1" dirty="0">
+            <a:endParaRPr lang="vi-VN" sz="3600" b="1" dirty="0">
               <a:solidFill>
                 <a:srgbClr val="660033"/>
               </a:solidFill>
@@ -3609,8 +3609,8 @@
         </p:nvSpPr>
         <p:spPr>
           <a:xfrm>
-            <a:off x="13653" y="5331987"/>
-            <a:ext cx="12178347" cy="707886"/>
+            <a:off x="13653" y="5362764"/>
+            <a:ext cx="12178347" cy="646331"/>
           </a:xfrm>
           <a:prstGeom prst="rect">
             <a:avLst/>
@@ -3625,7 +3625,7 @@
           <a:p>
             <a:pPr algn="ctr"/>
             <a:r>
-              <a:rPr lang="en-US" sz="4000" b="1" dirty="0">
+              <a:rPr lang="en-US" sz="3600" b="1" dirty="0">
                 <a:solidFill>
                   <a:srgbClr val="660033"/>
                 </a:solidFill>
@@ -3635,7 +3635,7 @@
               <a:t>( </a:t>
             </a:r>
             <a:r>
-              <a:rPr lang="zh-CN" altLang="en-US" sz="4000" b="1" dirty="0">
+              <a:rPr lang="zh-CN" altLang="en-US" sz="3600" b="1" dirty="0">
                 <a:solidFill>
                   <a:srgbClr val="660033"/>
                 </a:solidFill>
@@ -3645,7 +3645,7 @@
               <a:t>正歌</a:t>
             </a:r>
             <a:r>
-              <a:rPr lang="en-US" sz="4000" b="1" dirty="0">
+              <a:rPr lang="en-US" sz="3600" b="1" dirty="0">
                 <a:solidFill>
                   <a:srgbClr val="660033"/>
                 </a:solidFill>
@@ -3654,7 +3654,7 @@
               </a:rPr>
               <a:t> )</a:t>
             </a:r>
-            <a:endParaRPr lang="vi-VN" sz="4000" b="1" dirty="0">
+            <a:endParaRPr lang="vi-VN" sz="3600" b="1" dirty="0">
               <a:solidFill>
                 <a:srgbClr val="660033"/>
               </a:solidFill>
@@ -3772,8 +3772,8 @@
         </p:nvSpPr>
         <p:spPr>
           <a:xfrm>
-            <a:off x="13653" y="5331987"/>
-            <a:ext cx="12178347" cy="707886"/>
+            <a:off x="13653" y="5362764"/>
+            <a:ext cx="12178347" cy="646331"/>
           </a:xfrm>
           <a:prstGeom prst="rect">
             <a:avLst/>
@@ -3788,7 +3788,7 @@
           <a:p>
             <a:pPr algn="ctr"/>
             <a:r>
-              <a:rPr lang="en-US" sz="4000" b="1" dirty="0">
+              <a:rPr lang="en-US" sz="3600" b="1" dirty="0">
                 <a:solidFill>
                   <a:srgbClr val="660033"/>
                 </a:solidFill>
@@ -3798,7 +3798,7 @@
               <a:t>( </a:t>
             </a:r>
             <a:r>
-              <a:rPr lang="zh-CN" altLang="en-US" sz="4000" b="1" dirty="0">
+              <a:rPr lang="zh-CN" altLang="en-US" sz="3600" b="1" dirty="0">
                 <a:solidFill>
                   <a:srgbClr val="660033"/>
                 </a:solidFill>
@@ -3808,7 +3808,7 @@
               <a:t>正歌</a:t>
             </a:r>
             <a:r>
-              <a:rPr lang="en-US" sz="4000" b="1" dirty="0">
+              <a:rPr lang="en-US" sz="3600" b="1" dirty="0">
                 <a:solidFill>
                   <a:srgbClr val="660033"/>
                 </a:solidFill>
@@ -3817,7 +3817,7 @@
               </a:rPr>
               <a:t> )</a:t>
             </a:r>
-            <a:endParaRPr lang="vi-VN" sz="4000" b="1" dirty="0">
+            <a:endParaRPr lang="vi-VN" sz="3600" b="1" dirty="0">
               <a:solidFill>
                 <a:srgbClr val="660033"/>
               </a:solidFill>
@@ -3935,8 +3935,8 @@
         </p:nvSpPr>
         <p:spPr>
           <a:xfrm>
-            <a:off x="13653" y="5331987"/>
-            <a:ext cx="12178347" cy="707886"/>
+            <a:off x="13653" y="5362764"/>
+            <a:ext cx="12178347" cy="646331"/>
           </a:xfrm>
           <a:prstGeom prst="rect">
             <a:avLst/>
@@ -3951,7 +3951,7 @@
           <a:p>
             <a:pPr algn="ctr"/>
             <a:r>
-              <a:rPr lang="en-US" sz="4000" b="1" dirty="0">
+              <a:rPr lang="en-US" sz="3600" b="1" dirty="0">
                 <a:solidFill>
                   <a:srgbClr val="660033"/>
                 </a:solidFill>
@@ -3961,7 +3961,7 @@
               <a:t>( </a:t>
             </a:r>
             <a:r>
-              <a:rPr lang="zh-CN" altLang="en-US" sz="4000" b="1" dirty="0">
+              <a:rPr lang="zh-CN" altLang="en-US" sz="3600" b="1" dirty="0">
                 <a:solidFill>
                   <a:srgbClr val="660033"/>
                 </a:solidFill>
@@ -3971,7 +3971,7 @@
               <a:t>副歌</a:t>
             </a:r>
             <a:r>
-              <a:rPr lang="en-US" sz="4000" b="1" dirty="0">
+              <a:rPr lang="en-US" sz="3600" b="1" dirty="0">
                 <a:solidFill>
                   <a:srgbClr val="660033"/>
                 </a:solidFill>
@@ -3980,7 +3980,7 @@
               </a:rPr>
               <a:t> )</a:t>
             </a:r>
-            <a:endParaRPr lang="vi-VN" sz="4000" b="1" dirty="0">
+            <a:endParaRPr lang="vi-VN" sz="3600" b="1" dirty="0">
               <a:solidFill>
                 <a:srgbClr val="660033"/>
               </a:solidFill>
@@ -4098,8 +4098,8 @@
         </p:nvSpPr>
         <p:spPr>
           <a:xfrm>
-            <a:off x="13653" y="5331987"/>
-            <a:ext cx="12178347" cy="707886"/>
+            <a:off x="13653" y="5362764"/>
+            <a:ext cx="12178347" cy="646331"/>
           </a:xfrm>
           <a:prstGeom prst="rect">
             <a:avLst/>
@@ -4114,7 +4114,7 @@
           <a:p>
             <a:pPr algn="ctr"/>
             <a:r>
-              <a:rPr lang="en-US" sz="4000" b="1" dirty="0">
+              <a:rPr lang="en-US" sz="3600" b="1" dirty="0">
                 <a:solidFill>
                   <a:srgbClr val="660033"/>
                 </a:solidFill>
@@ -4124,7 +4124,7 @@
               <a:t>( </a:t>
             </a:r>
             <a:r>
-              <a:rPr lang="zh-CN" altLang="en-US" sz="4000" b="1" dirty="0">
+              <a:rPr lang="zh-CN" altLang="en-US" sz="3600" b="1" dirty="0">
                 <a:solidFill>
                   <a:srgbClr val="660033"/>
                 </a:solidFill>
@@ -4134,7 +4134,7 @@
               <a:t>副歌</a:t>
             </a:r>
             <a:r>
-              <a:rPr lang="en-US" sz="4000" b="1" dirty="0">
+              <a:rPr lang="en-US" sz="3600" b="1" dirty="0">
                 <a:solidFill>
                   <a:srgbClr val="660033"/>
                 </a:solidFill>
@@ -4143,7 +4143,7 @@
               </a:rPr>
               <a:t> )</a:t>
             </a:r>
-            <a:endParaRPr lang="vi-VN" sz="4000" b="1" dirty="0">
+            <a:endParaRPr lang="vi-VN" sz="3600" b="1" dirty="0">
               <a:solidFill>
                 <a:srgbClr val="660033"/>
               </a:solidFill>
